--- a/slides/decks/s07-chronic-gvhd-ecp.pptx
+++ b/slides/decks/s07-chronic-gvhd-ecp.pptx
@@ -133,13 +133,13 @@
   <p:extLst>
     <p:ext uri="{521415D9-36F7-43E2-AB2F-B90AF26B5E84}">
       <p14:sectionLst xmlns:p14="http://schemas.microsoft.com/office/powerpoint/2010/main">
-        <p14:section name="Opening" id="{e97f9a26-41ab-86d0-3c7a-1d7ea9ee77af}">
+        <p14:section name="Opening" id="{739cc9b2-6f39-e831-86de-d1fe1423c501}">
           <p14:sldIdLst>
             <p14:sldId id="256"/>
             <p14:sldId id="257"/>
           </p14:sldIdLst>
         </p14:section>
-        <p14:section name="Burden and diagnosis" id="{4e6a556d-6edf-4713-ee8a-9f2e5635101d}">
+        <p14:section name="Burden and diagnosis" id="{3ce04f61-6cd4-2da3-aeca-e1c899055016}">
           <p14:sldIdLst>
             <p14:sldId id="258"/>
             <p14:sldId id="259"/>
@@ -148,7 +148,7 @@
             <p14:sldId id="262"/>
           </p14:sldIdLst>
         </p14:section>
-        <p14:section name="First-line therapy" id="{ca05ce8f-75e3-00ff-6c0d-3f0809511a11}">
+        <p14:section name="First-line therapy" id="{ef2f68ef-6978-435a-475d-e7ca0ba9accc}">
           <p14:sldIdLst>
             <p14:sldId id="263"/>
             <p14:sldId id="264"/>
@@ -156,7 +156,7 @@
             <p14:sldId id="266"/>
           </p14:sldIdLst>
         </p14:section>
-        <p14:section name="Second line and ECP" id="{045a0605-d1f0-3645-5ce3-782e4b9a2bed}">
+        <p14:section name="Second line and ECP" id="{a4e76c2b-6147-530e-3704-6796607f3c6a}">
           <p14:sldIdLst>
             <p14:sldId id="267"/>
             <p14:sldId id="268"/>
@@ -165,7 +165,7 @@
             <p14:sldId id="271"/>
           </p14:sldIdLst>
         </p14:section>
-        <p14:section name="Board questions" id="{a3b5b5ee-a4d7-244d-b136-405f0286e125}">
+        <p14:section name="Board questions" id="{b5cd419b-b347-fda6-ddea-932f751cdcac}">
           <p14:sldIdLst>
             <p14:sldId id="272"/>
             <p14:sldId id="273"/>
@@ -175,13 +175,13 @@
             <p14:sldId id="277"/>
           </p14:sldIdLst>
         </p14:section>
-        <p14:section name="References" id="{5742b045-aab5-2d60-3721-5cf9453989b6}">
+        <p14:section name="References" id="{a912971e-b4ac-85ad-4879-2e1eff5c06dd}">
           <p14:sldIdLst>
             <p14:sldId id="278"/>
             <p14:sldId id="279"/>
           </p14:sldIdLst>
         </p14:section>
-        <p14:section name="Backup" id="{d482107b-d701-94b9-a3fa-f62b348ff1da}">
+        <p14:section name="Backup" id="{ab263975-b5ac-946b-03d8-4bc6a0d1a553}">
           <p14:sldIdLst>
             <p14:sldId id="280"/>
             <p14:sldId id="281"/>
